--- a/docs/答辩/答辩PPT-5分钟.pptx
+++ b/docs/答辩/答辩PPT-5分钟.pptx
@@ -1338,6 +1338,11 @@
           <a:p>
             <a:r>
               <a:t>它解决的第一个问题是"成果散、留不住"——研学、走访、课堂三类材料落在同一条叙事线上，而不是三个文件夹。</a:t>
+            </a:r>
+          </a:p>
+          <a:p>
+            <a:r>
+              <a:t>（可现场演示）屏幕右下角这个绿色按钮就是网站入口，点一下就能打开；点绿色卡片任意处也可以。</a:t>
             </a:r>
           </a:p>
           <a:p>
@@ -20213,7 +20218,9 @@
       </p:sp>
       <p:sp>
         <p:nvSpPr>
-          <p:cNvPr id="18" name="Rounded Rectangle 17"/>
+          <p:cNvPr id="18" name="Rounded Rectangle 17">
+            <a:hlinkClick r:id="rId2"/>
+          </p:cNvPr>
           <p:cNvSpPr/>
           <p:nvPr/>
         </p:nvSpPr>
@@ -20411,66 +20418,25 @@
       </p:sp>
       <p:sp>
         <p:nvSpPr>
-          <p:cNvPr id="22" name="TextBox 21"/>
-          <p:cNvSpPr txBox="1"/>
-          <p:nvPr/>
-        </p:nvSpPr>
-        <p:spPr>
-          <a:xfrm>
-            <a:off x="684000" y="5238000"/>
-            <a:ext cx="6623999" cy="251999"/>
-          </a:xfrm>
-          <a:prstGeom prst="rect">
-            <a:avLst/>
-          </a:prstGeom>
-          <a:noFill/>
-        </p:spPr>
-        <p:txBody>
-          <a:bodyPr wrap="square" lIns="0" rIns="0" tIns="0" bIns="0" anchor="t">
-            <a:spAutoFit/>
-          </a:bodyPr>
-          <a:lstStyle/>
-          <a:p>
-            <a:pPr algn="l">
-              <a:lnSpc>
-                <a:spcPct val="128000"/>
-              </a:lnSpc>
-              <a:spcBef>
-                <a:spcPts val="0"/>
-              </a:spcBef>
-              <a:spcAft>
-                <a:spcPts val="0"/>
-              </a:spcAft>
-            </a:pPr>
-            <a:r>
-              <a:rPr sz="1150" b="1" i="0" spc="50">
-                <a:solidFill>
-                  <a:srgbClr val="3E7A6B"/>
-                </a:solidFill>
-                <a:latin typeface="微软雅黑"/>
-                <a:ea typeface="微软雅黑"/>
-                <a:cs typeface="微软雅黑"/>
-              </a:rPr>
-              <a:t>5 个人分工完成</a:t>
-            </a:r>
-          </a:p>
-        </p:txBody>
-      </p:sp>
-      <p:sp>
-        <p:nvSpPr>
-          <p:cNvPr id="23" name="Rectangle 22"/>
+          <p:cNvPr id="22" name="Rounded Rectangle 21">
+            <a:hlinkClick r:id="rId2"/>
+          </p:cNvPr>
           <p:cNvSpPr/>
           <p:nvPr/>
         </p:nvSpPr>
         <p:spPr>
           <a:xfrm>
-            <a:off x="684000" y="5490000"/>
-            <a:ext cx="1584000" cy="630000"/>
-          </a:xfrm>
-          <a:prstGeom prst="rect">
-            <a:avLst/>
-          </a:prstGeom>
-          <a:noFill/>
+            <a:off x="7560000" y="4806000"/>
+            <a:ext cx="3960000" cy="558000"/>
+          </a:xfrm>
+          <a:prstGeom prst="roundRect">
+            <a:avLst>
+              <a:gd name="adj" fmla="val 14000"/>
+            </a:avLst>
+          </a:prstGeom>
+          <a:solidFill>
+            <a:srgbClr val="1E4A3C"/>
+          </a:solidFill>
           <a:ln>
             <a:noFill/>
           </a:ln>
@@ -20495,12 +20461,203 @@
           <a:lstStyle/>
           <a:p>
             <a:pPr algn="ctr"/>
-          </a:p>
-        </p:txBody>
-      </p:sp>
-      <p:sp>
-        <p:nvSpPr>
-          <p:cNvPr id="24" name="Rectangle 23"/>
+            <a:r>
+              <a:rPr sz="1200" b="1" i="0">
+                <a:solidFill>
+                  <a:srgbClr val="FFFFFF"/>
+                </a:solidFill>
+                <a:latin typeface="微软雅黑"/>
+                <a:ea typeface="微软雅黑"/>
+                <a:cs typeface="微软雅黑"/>
+              </a:rPr>
+              <a:t>直达网站 ↗　xulu-debug.github.io/jieqi-site</a:t>
+            </a:r>
+          </a:p>
+        </p:txBody>
+      </p:sp>
+      <p:sp>
+        <p:nvSpPr>
+          <p:cNvPr id="23" name="TextBox 22"/>
+          <p:cNvSpPr txBox="1"/>
+          <p:nvPr/>
+        </p:nvSpPr>
+        <p:spPr>
+          <a:xfrm>
+            <a:off x="7560000" y="5418000"/>
+            <a:ext cx="3960000" cy="216000"/>
+          </a:xfrm>
+          <a:prstGeom prst="rect">
+            <a:avLst/>
+          </a:prstGeom>
+          <a:noFill/>
+        </p:spPr>
+        <p:txBody>
+          <a:bodyPr wrap="square" lIns="0" rIns="0" tIns="0" bIns="0" anchor="t">
+            <a:spAutoFit/>
+          </a:bodyPr>
+          <a:lstStyle/>
+          <a:p>
+            <a:pPr algn="ctr">
+              <a:lnSpc>
+                <a:spcPct val="128000"/>
+              </a:lnSpc>
+              <a:spcBef>
+                <a:spcPts val="0"/>
+              </a:spcBef>
+              <a:spcAft>
+                <a:spcPts val="0"/>
+              </a:spcAft>
+            </a:pPr>
+            <a:r>
+              <a:rPr sz="880" b="0" i="0">
+                <a:solidFill>
+                  <a:srgbClr val="6B7A73"/>
+                </a:solidFill>
+                <a:latin typeface="微软雅黑"/>
+                <a:ea typeface="微软雅黑"/>
+                <a:cs typeface="微软雅黑"/>
+              </a:rPr>
+              <a:t>点击按钮，或点绿色卡片任意处，即可打开网站</a:t>
+            </a:r>
+          </a:p>
+        </p:txBody>
+      </p:sp>
+      <p:sp>
+        <p:nvSpPr>
+          <p:cNvPr id="24" name="Rectangle 23">
+            <a:hlinkClick r:id="rId2"/>
+          </p:cNvPr>
+          <p:cNvSpPr/>
+          <p:nvPr/>
+        </p:nvSpPr>
+        <p:spPr>
+          <a:xfrm>
+            <a:off x="7560000" y="1980000"/>
+            <a:ext cx="3960000" cy="2664000"/>
+          </a:xfrm>
+          <a:prstGeom prst="rect">
+            <a:avLst/>
+          </a:prstGeom>
+          <a:noFill/>
+          <a:ln>
+            <a:noFill/>
+          </a:ln>
+          <a:effectLst/>
+        </p:spPr>
+        <p:style>
+          <a:lnRef idx="1">
+            <a:schemeClr val="accent1"/>
+          </a:lnRef>
+          <a:fillRef idx="3">
+            <a:schemeClr val="accent1"/>
+          </a:fillRef>
+          <a:effectRef idx="2">
+            <a:schemeClr val="accent1"/>
+          </a:effectRef>
+          <a:fontRef idx="minor">
+            <a:schemeClr val="lt1"/>
+          </a:fontRef>
+        </p:style>
+        <p:txBody>
+          <a:bodyPr rtlCol="0" anchor="ctr"/>
+          <a:lstStyle/>
+          <a:p>
+            <a:pPr algn="ctr"/>
+          </a:p>
+        </p:txBody>
+      </p:sp>
+      <p:sp>
+        <p:nvSpPr>
+          <p:cNvPr id="25" name="TextBox 24"/>
+          <p:cNvSpPr txBox="1"/>
+          <p:nvPr/>
+        </p:nvSpPr>
+        <p:spPr>
+          <a:xfrm>
+            <a:off x="684000" y="5238000"/>
+            <a:ext cx="6623999" cy="251999"/>
+          </a:xfrm>
+          <a:prstGeom prst="rect">
+            <a:avLst/>
+          </a:prstGeom>
+          <a:noFill/>
+        </p:spPr>
+        <p:txBody>
+          <a:bodyPr wrap="square" lIns="0" rIns="0" tIns="0" bIns="0" anchor="t">
+            <a:spAutoFit/>
+          </a:bodyPr>
+          <a:lstStyle/>
+          <a:p>
+            <a:pPr algn="l">
+              <a:lnSpc>
+                <a:spcPct val="128000"/>
+              </a:lnSpc>
+              <a:spcBef>
+                <a:spcPts val="0"/>
+              </a:spcBef>
+              <a:spcAft>
+                <a:spcPts val="0"/>
+              </a:spcAft>
+            </a:pPr>
+            <a:r>
+              <a:rPr sz="1150" b="1" i="0" spc="50">
+                <a:solidFill>
+                  <a:srgbClr val="3E7A6B"/>
+                </a:solidFill>
+                <a:latin typeface="微软雅黑"/>
+                <a:ea typeface="微软雅黑"/>
+                <a:cs typeface="微软雅黑"/>
+              </a:rPr>
+              <a:t>5 个人分工完成</a:t>
+            </a:r>
+          </a:p>
+        </p:txBody>
+      </p:sp>
+      <p:sp>
+        <p:nvSpPr>
+          <p:cNvPr id="26" name="Rectangle 25"/>
+          <p:cNvSpPr/>
+          <p:nvPr/>
+        </p:nvSpPr>
+        <p:spPr>
+          <a:xfrm>
+            <a:off x="684000" y="5490000"/>
+            <a:ext cx="1584000" cy="630000"/>
+          </a:xfrm>
+          <a:prstGeom prst="rect">
+            <a:avLst/>
+          </a:prstGeom>
+          <a:noFill/>
+          <a:ln>
+            <a:noFill/>
+          </a:ln>
+          <a:effectLst/>
+        </p:spPr>
+        <p:style>
+          <a:lnRef idx="1">
+            <a:schemeClr val="accent1"/>
+          </a:lnRef>
+          <a:fillRef idx="3">
+            <a:schemeClr val="accent1"/>
+          </a:fillRef>
+          <a:effectRef idx="2">
+            <a:schemeClr val="accent1"/>
+          </a:effectRef>
+          <a:fontRef idx="minor">
+            <a:schemeClr val="lt1"/>
+          </a:fontRef>
+        </p:style>
+        <p:txBody>
+          <a:bodyPr rtlCol="0" anchor="ctr" wrap="square" lIns="0" rIns="0" tIns="0" bIns="0"/>
+          <a:lstStyle/>
+          <a:p>
+            <a:pPr algn="ctr"/>
+          </a:p>
+        </p:txBody>
+      </p:sp>
+      <p:sp>
+        <p:nvSpPr>
+          <p:cNvPr id="27" name="Rectangle 26"/>
           <p:cNvSpPr/>
           <p:nvPr/>
         </p:nvSpPr>
@@ -20544,7 +20701,7 @@
       </p:sp>
       <p:sp>
         <p:nvSpPr>
-          <p:cNvPr id="25" name="TextBox 24"/>
+          <p:cNvPr id="28" name="TextBox 27"/>
           <p:cNvSpPr txBox="1"/>
           <p:nvPr/>
         </p:nvSpPr>
@@ -20591,7 +20748,7 @@
       </p:sp>
       <p:sp>
         <p:nvSpPr>
-          <p:cNvPr id="26" name="TextBox 25"/>
+          <p:cNvPr id="29" name="TextBox 28"/>
           <p:cNvSpPr txBox="1"/>
           <p:nvPr/>
         </p:nvSpPr>
@@ -20638,7 +20795,7 @@
       </p:sp>
       <p:sp>
         <p:nvSpPr>
-          <p:cNvPr id="27" name="Rectangle 26"/>
+          <p:cNvPr id="30" name="Rectangle 29"/>
           <p:cNvSpPr/>
           <p:nvPr/>
         </p:nvSpPr>
@@ -20680,7 +20837,7 @@
       </p:sp>
       <p:sp>
         <p:nvSpPr>
-          <p:cNvPr id="28" name="Rectangle 27"/>
+          <p:cNvPr id="31" name="Rectangle 30"/>
           <p:cNvSpPr/>
           <p:nvPr/>
         </p:nvSpPr>
@@ -20724,7 +20881,7 @@
       </p:sp>
       <p:sp>
         <p:nvSpPr>
-          <p:cNvPr id="29" name="TextBox 28"/>
+          <p:cNvPr id="32" name="TextBox 31"/>
           <p:cNvSpPr txBox="1"/>
           <p:nvPr/>
         </p:nvSpPr>
@@ -20771,7 +20928,7 @@
       </p:sp>
       <p:sp>
         <p:nvSpPr>
-          <p:cNvPr id="30" name="TextBox 29"/>
+          <p:cNvPr id="33" name="TextBox 32"/>
           <p:cNvSpPr txBox="1"/>
           <p:nvPr/>
         </p:nvSpPr>
@@ -20818,7 +20975,7 @@
       </p:sp>
       <p:sp>
         <p:nvSpPr>
-          <p:cNvPr id="31" name="Rectangle 30"/>
+          <p:cNvPr id="34" name="Rectangle 33"/>
           <p:cNvSpPr/>
           <p:nvPr/>
         </p:nvSpPr>
@@ -20860,7 +21017,7 @@
       </p:sp>
       <p:sp>
         <p:nvSpPr>
-          <p:cNvPr id="32" name="Rectangle 31"/>
+          <p:cNvPr id="35" name="Rectangle 34"/>
           <p:cNvSpPr/>
           <p:nvPr/>
         </p:nvSpPr>
@@ -20904,7 +21061,7 @@
       </p:sp>
       <p:sp>
         <p:nvSpPr>
-          <p:cNvPr id="33" name="TextBox 32"/>
+          <p:cNvPr id="36" name="TextBox 35"/>
           <p:cNvSpPr txBox="1"/>
           <p:nvPr/>
         </p:nvSpPr>
@@ -20951,7 +21108,7 @@
       </p:sp>
       <p:sp>
         <p:nvSpPr>
-          <p:cNvPr id="34" name="TextBox 33"/>
+          <p:cNvPr id="37" name="TextBox 36"/>
           <p:cNvSpPr txBox="1"/>
           <p:nvPr/>
         </p:nvSpPr>
@@ -20998,7 +21155,7 @@
       </p:sp>
       <p:sp>
         <p:nvSpPr>
-          <p:cNvPr id="35" name="Rectangle 34"/>
+          <p:cNvPr id="38" name="Rectangle 37"/>
           <p:cNvSpPr/>
           <p:nvPr/>
         </p:nvSpPr>
@@ -21040,7 +21197,7 @@
       </p:sp>
       <p:sp>
         <p:nvSpPr>
-          <p:cNvPr id="36" name="Rectangle 35"/>
+          <p:cNvPr id="39" name="Rectangle 38"/>
           <p:cNvSpPr/>
           <p:nvPr/>
         </p:nvSpPr>
@@ -21084,7 +21241,7 @@
       </p:sp>
       <p:sp>
         <p:nvSpPr>
-          <p:cNvPr id="37" name="TextBox 36"/>
+          <p:cNvPr id="40" name="TextBox 39"/>
           <p:cNvSpPr txBox="1"/>
           <p:nvPr/>
         </p:nvSpPr>
@@ -21131,7 +21288,7 @@
       </p:sp>
       <p:sp>
         <p:nvSpPr>
-          <p:cNvPr id="38" name="TextBox 37"/>
+          <p:cNvPr id="41" name="TextBox 40"/>
           <p:cNvSpPr txBox="1"/>
           <p:nvPr/>
         </p:nvSpPr>
@@ -21178,7 +21335,7 @@
       </p:sp>
       <p:sp>
         <p:nvSpPr>
-          <p:cNvPr id="39" name="TextBox 38"/>
+          <p:cNvPr id="42" name="TextBox 41"/>
           <p:cNvSpPr txBox="1"/>
           <p:nvPr/>
         </p:nvSpPr>
@@ -21225,7 +21382,7 @@
       </p:sp>
       <p:sp>
         <p:nvSpPr>
-          <p:cNvPr id="40" name="TextBox 39"/>
+          <p:cNvPr id="43" name="TextBox 42"/>
           <p:cNvSpPr txBox="1"/>
           <p:nvPr/>
         </p:nvSpPr>
